--- a/docs/presentation/GeoLogics_SIH2026_Presentation.pptx
+++ b/docs/presentation/GeoLogics_SIH2026_Presentation.pptx
@@ -15744,7 +15744,7 @@
                 <a:ea typeface="Arial" pitchFamily="34" charset="-122"/>
                 <a:cs typeface="Arial" pitchFamily="34" charset="-120"/>
               </a:rPr>
-              <a:t>Official · AICTE</a:t>
+              <a:t>Official · AICTE (Google Drive copy)</a:t>
             </a:r>
             <a:endParaRPr lang="en-US" sz="1150" dirty="0"/>
           </a:p>
